--- a/weekly_report/8_31/resource/架构图.pptx
+++ b/weekly_report/8_31/resource/架构图.pptx
@@ -8,6 +8,7 @@
     <p:sldId id="256" r:id="rId2"/>
     <p:sldId id="257" r:id="rId3"/>
     <p:sldId id="258" r:id="rId4"/>
+    <p:sldId id="259" r:id="rId5"/>
   </p:sldIdLst>
   <p:sldSz cx="45720000" cy="27432000"/>
   <p:notesSz cx="6858000" cy="9144000"/>
@@ -245,7 +246,7 @@
           <a:p>
             <a:fld id="{CF4BA9C3-62E2-4E40-AAD5-C67EE55B437A}" type="datetimeFigureOut">
               <a:rPr lang="en-US" smtClean="0"/>
-              <a:t>8/27/2026</a:t>
+              <a:t>8/30/2026</a:t>
             </a:fld>
             <a:endParaRPr lang="en-US"/>
           </a:p>
@@ -415,7 +416,7 @@
           <a:p>
             <a:fld id="{CF4BA9C3-62E2-4E40-AAD5-C67EE55B437A}" type="datetimeFigureOut">
               <a:rPr lang="en-US" smtClean="0"/>
-              <a:t>8/27/2026</a:t>
+              <a:t>8/30/2026</a:t>
             </a:fld>
             <a:endParaRPr lang="en-US"/>
           </a:p>
@@ -595,7 +596,7 @@
           <a:p>
             <a:fld id="{CF4BA9C3-62E2-4E40-AAD5-C67EE55B437A}" type="datetimeFigureOut">
               <a:rPr lang="en-US" smtClean="0"/>
-              <a:t>8/27/2026</a:t>
+              <a:t>8/30/2026</a:t>
             </a:fld>
             <a:endParaRPr lang="en-US"/>
           </a:p>
@@ -765,7 +766,7 @@
           <a:p>
             <a:fld id="{CF4BA9C3-62E2-4E40-AAD5-C67EE55B437A}" type="datetimeFigureOut">
               <a:rPr lang="en-US" smtClean="0"/>
-              <a:t>8/27/2026</a:t>
+              <a:t>8/30/2026</a:t>
             </a:fld>
             <a:endParaRPr lang="en-US"/>
           </a:p>
@@ -1011,7 +1012,7 @@
           <a:p>
             <a:fld id="{CF4BA9C3-62E2-4E40-AAD5-C67EE55B437A}" type="datetimeFigureOut">
               <a:rPr lang="en-US" smtClean="0"/>
-              <a:t>8/27/2026</a:t>
+              <a:t>8/30/2026</a:t>
             </a:fld>
             <a:endParaRPr lang="en-US"/>
           </a:p>
@@ -1243,7 +1244,7 @@
           <a:p>
             <a:fld id="{CF4BA9C3-62E2-4E40-AAD5-C67EE55B437A}" type="datetimeFigureOut">
               <a:rPr lang="en-US" smtClean="0"/>
-              <a:t>8/27/2026</a:t>
+              <a:t>8/30/2026</a:t>
             </a:fld>
             <a:endParaRPr lang="en-US"/>
           </a:p>
@@ -1610,7 +1611,7 @@
           <a:p>
             <a:fld id="{CF4BA9C3-62E2-4E40-AAD5-C67EE55B437A}" type="datetimeFigureOut">
               <a:rPr lang="en-US" smtClean="0"/>
-              <a:t>8/27/2026</a:t>
+              <a:t>8/30/2026</a:t>
             </a:fld>
             <a:endParaRPr lang="en-US"/>
           </a:p>
@@ -1728,7 +1729,7 @@
           <a:p>
             <a:fld id="{CF4BA9C3-62E2-4E40-AAD5-C67EE55B437A}" type="datetimeFigureOut">
               <a:rPr lang="en-US" smtClean="0"/>
-              <a:t>8/27/2026</a:t>
+              <a:t>8/30/2026</a:t>
             </a:fld>
             <a:endParaRPr lang="en-US"/>
           </a:p>
@@ -1823,7 +1824,7 @@
           <a:p>
             <a:fld id="{CF4BA9C3-62E2-4E40-AAD5-C67EE55B437A}" type="datetimeFigureOut">
               <a:rPr lang="en-US" smtClean="0"/>
-              <a:t>8/27/2026</a:t>
+              <a:t>8/30/2026</a:t>
             </a:fld>
             <a:endParaRPr lang="en-US"/>
           </a:p>
@@ -2100,7 +2101,7 @@
           <a:p>
             <a:fld id="{CF4BA9C3-62E2-4E40-AAD5-C67EE55B437A}" type="datetimeFigureOut">
               <a:rPr lang="en-US" smtClean="0"/>
-              <a:t>8/27/2026</a:t>
+              <a:t>8/30/2026</a:t>
             </a:fld>
             <a:endParaRPr lang="en-US"/>
           </a:p>
@@ -2357,7 +2358,7 @@
           <a:p>
             <a:fld id="{CF4BA9C3-62E2-4E40-AAD5-C67EE55B437A}" type="datetimeFigureOut">
               <a:rPr lang="en-US" smtClean="0"/>
-              <a:t>8/27/2026</a:t>
+              <a:t>8/30/2026</a:t>
             </a:fld>
             <a:endParaRPr lang="en-US"/>
           </a:p>
@@ -2570,7 +2571,7 @@
           <a:p>
             <a:fld id="{CF4BA9C3-62E2-4E40-AAD5-C67EE55B437A}" type="datetimeFigureOut">
               <a:rPr lang="en-US" smtClean="0"/>
-              <a:t>8/27/2026</a:t>
+              <a:t>8/30/2026</a:t>
             </a:fld>
             <a:endParaRPr lang="en-US"/>
           </a:p>
@@ -2985,10 +2986,10 @@
       </p:grpSpPr>
       <p:grpSp>
         <p:nvGrpSpPr>
-          <p:cNvPr id="2" name="Group 1">
+          <p:cNvPr id="3" name="Group 2">
             <a:extLst>
               <a:ext uri="{FF2B5EF4-FFF2-40B4-BE49-F238E27FC236}">
-                <a16:creationId xmlns:a16="http://schemas.microsoft.com/office/drawing/2014/main" id="{B008CA5B-B540-82EA-83A2-191BAEC2350C}"/>
+                <a16:creationId xmlns:a16="http://schemas.microsoft.com/office/drawing/2014/main" id="{9A59B627-3738-4990-FD15-5AB6E5B92FD5}"/>
               </a:ext>
             </a:extLst>
           </p:cNvPr>
@@ -8151,6 +8152,1449 @@
     <p:extLst>
       <p:ext uri="{BB962C8B-B14F-4D97-AF65-F5344CB8AC3E}">
         <p14:creationId xmlns:p14="http://schemas.microsoft.com/office/powerpoint/2010/main" val="2488822040"/>
+      </p:ext>
+    </p:extLst>
+  </p:cSld>
+  <p:clrMapOvr>
+    <a:masterClrMapping/>
+  </p:clrMapOvr>
+</p:sld>
+</file>
+
+<file path=ppt/slides/slide4.xml><?xml version="1.0" encoding="utf-8"?>
+<p:sld xmlns:a="http://schemas.openxmlformats.org/drawingml/2006/main" xmlns:r="http://schemas.openxmlformats.org/officeDocument/2006/relationships" xmlns:p="http://schemas.openxmlformats.org/presentationml/2006/main">
+  <p:cSld>
+    <p:spTree>
+      <p:nvGrpSpPr>
+        <p:cNvPr id="1" name=""/>
+        <p:cNvGrpSpPr/>
+        <p:nvPr/>
+      </p:nvGrpSpPr>
+      <p:grpSpPr>
+        <a:xfrm>
+          <a:off x="0" y="0"/>
+          <a:ext cx="0" cy="0"/>
+          <a:chOff x="0" y="0"/>
+          <a:chExt cx="0" cy="0"/>
+        </a:xfrm>
+      </p:grpSpPr>
+      <p:sp>
+        <p:nvSpPr>
+          <p:cNvPr id="41" name="TextBox 40">
+            <a:extLst>
+              <a:ext uri="{FF2B5EF4-FFF2-40B4-BE49-F238E27FC236}">
+                <a16:creationId xmlns:a16="http://schemas.microsoft.com/office/drawing/2014/main" id="{2208B09B-4CED-8E1C-2057-DFB786850D9E}"/>
+              </a:ext>
+            </a:extLst>
+          </p:cNvPr>
+          <p:cNvSpPr txBox="1"/>
+          <p:nvPr/>
+        </p:nvSpPr>
+        <p:spPr>
+          <a:xfrm>
+            <a:off x="26822400" y="16573980"/>
+            <a:ext cx="65" cy="276999"/>
+          </a:xfrm>
+          <a:prstGeom prst="rect">
+            <a:avLst/>
+          </a:prstGeom>
+          <a:noFill/>
+        </p:spPr>
+        <p:txBody>
+          <a:bodyPr wrap="none" lIns="0" tIns="0" rIns="0" bIns="0" rtlCol="0">
+            <a:spAutoFit/>
+          </a:bodyPr>
+          <a:lstStyle/>
+          <a:p>
+            <a:endParaRPr lang="en-US" dirty="0"/>
+          </a:p>
+        </p:txBody>
+      </p:sp>
+      <p:grpSp>
+        <p:nvGrpSpPr>
+          <p:cNvPr id="57" name="Group 56">
+            <a:extLst>
+              <a:ext uri="{FF2B5EF4-FFF2-40B4-BE49-F238E27FC236}">
+                <a16:creationId xmlns:a16="http://schemas.microsoft.com/office/drawing/2014/main" id="{AC4AEAA7-2D16-F93B-681A-841AECFA2B57}"/>
+              </a:ext>
+            </a:extLst>
+          </p:cNvPr>
+          <p:cNvGrpSpPr/>
+          <p:nvPr/>
+        </p:nvGrpSpPr>
+        <p:grpSpPr>
+          <a:xfrm>
+            <a:off x="9484926" y="10581021"/>
+            <a:ext cx="23211888" cy="5615531"/>
+            <a:chOff x="9484926" y="10581021"/>
+            <a:chExt cx="23211888" cy="5615531"/>
+          </a:xfrm>
+        </p:grpSpPr>
+        <p:grpSp>
+          <p:nvGrpSpPr>
+            <p:cNvPr id="9" name="Group 8">
+              <a:extLst>
+                <a:ext uri="{FF2B5EF4-FFF2-40B4-BE49-F238E27FC236}">
+                  <a16:creationId xmlns:a16="http://schemas.microsoft.com/office/drawing/2014/main" id="{42094B19-FB50-FD7D-50E5-43A10F1B05DF}"/>
+                </a:ext>
+              </a:extLst>
+            </p:cNvPr>
+            <p:cNvGrpSpPr/>
+            <p:nvPr/>
+          </p:nvGrpSpPr>
+          <p:grpSpPr>
+            <a:xfrm>
+              <a:off x="9484926" y="13764880"/>
+              <a:ext cx="1936203" cy="1935028"/>
+              <a:chOff x="8142075" y="10728507"/>
+              <a:chExt cx="1936203" cy="1935028"/>
+            </a:xfrm>
+          </p:grpSpPr>
+          <p:pic>
+            <p:nvPicPr>
+              <p:cNvPr id="7" name="Picture 6" descr="A map of a city&#10;&#10;Description automatically generated">
+                <a:extLst>
+                  <a:ext uri="{FF2B5EF4-FFF2-40B4-BE49-F238E27FC236}">
+                    <a16:creationId xmlns:a16="http://schemas.microsoft.com/office/drawing/2014/main" id="{21CFC00A-FDF5-908D-08C3-ED62A502AAE3}"/>
+                  </a:ext>
+                </a:extLst>
+              </p:cNvPr>
+              <p:cNvPicPr>
+                <a:picLocks noChangeAspect="1"/>
+              </p:cNvPicPr>
+              <p:nvPr/>
+            </p:nvPicPr>
+            <p:blipFill>
+              <a:blip r:embed="rId2">
+                <a:extLst>
+                  <a:ext uri="{28A0092B-C50C-407E-A947-70E740481C1C}">
+                    <a14:useLocalDpi xmlns:a14="http://schemas.microsoft.com/office/drawing/2010/main" val="0"/>
+                  </a:ext>
+                </a:extLst>
+              </a:blip>
+              <a:stretch>
+                <a:fillRect/>
+              </a:stretch>
+            </p:blipFill>
+            <p:spPr>
+              <a:xfrm>
+                <a:off x="8142075" y="10728507"/>
+                <a:ext cx="1828800" cy="1828800"/>
+              </a:xfrm>
+              <a:prstGeom prst="rect">
+                <a:avLst/>
+              </a:prstGeom>
+            </p:spPr>
+          </p:pic>
+          <p:pic>
+            <p:nvPicPr>
+              <p:cNvPr id="8" name="Picture 7" descr="A black and white image of a grid&#10;&#10;Description automatically generated with medium confidence">
+                <a:extLst>
+                  <a:ext uri="{FF2B5EF4-FFF2-40B4-BE49-F238E27FC236}">
+                    <a16:creationId xmlns:a16="http://schemas.microsoft.com/office/drawing/2014/main" id="{9A7A3A58-AEA8-A815-2CAD-42CAAD1D019E}"/>
+                  </a:ext>
+                </a:extLst>
+              </p:cNvPr>
+              <p:cNvPicPr>
+                <a:picLocks noChangeAspect="1"/>
+              </p:cNvPicPr>
+              <p:nvPr/>
+            </p:nvPicPr>
+            <p:blipFill>
+              <a:blip r:embed="rId3">
+                <a:extLst>
+                  <a:ext uri="{28A0092B-C50C-407E-A947-70E740481C1C}">
+                    <a14:useLocalDpi xmlns:a14="http://schemas.microsoft.com/office/drawing/2010/main" val="0"/>
+                  </a:ext>
+                </a:extLst>
+              </a:blip>
+              <a:stretch>
+                <a:fillRect/>
+              </a:stretch>
+            </p:blipFill>
+            <p:spPr>
+              <a:xfrm>
+                <a:off x="8249478" y="10834735"/>
+                <a:ext cx="1828800" cy="1828800"/>
+              </a:xfrm>
+              <a:prstGeom prst="rect">
+                <a:avLst/>
+              </a:prstGeom>
+            </p:spPr>
+          </p:pic>
+        </p:grpSp>
+        <p:sp>
+          <p:nvSpPr>
+            <p:cNvPr id="10" name="Rectangle: Rounded Corners 9">
+              <a:extLst>
+                <a:ext uri="{FF2B5EF4-FFF2-40B4-BE49-F238E27FC236}">
+                  <a16:creationId xmlns:a16="http://schemas.microsoft.com/office/drawing/2014/main" id="{0AE75CE1-5083-E037-63C4-D84D2400E267}"/>
+                </a:ext>
+              </a:extLst>
+            </p:cNvPr>
+            <p:cNvSpPr/>
+            <p:nvPr/>
+          </p:nvSpPr>
+          <p:spPr>
+            <a:xfrm>
+              <a:off x="12155194" y="14254239"/>
+              <a:ext cx="2293620" cy="1062537"/>
+            </a:xfrm>
+            <a:prstGeom prst="roundRect">
+              <a:avLst/>
+            </a:prstGeom>
+            <a:solidFill>
+              <a:srgbClr val="176B87"/>
+            </a:solidFill>
+            <a:ln w="50800">
+              <a:solidFill>
+                <a:srgbClr val="0F4C5C"/>
+              </a:solidFill>
+            </a:ln>
+          </p:spPr>
+          <p:style>
+            <a:lnRef idx="2">
+              <a:schemeClr val="accent1">
+                <a:shade val="15000"/>
+              </a:schemeClr>
+            </a:lnRef>
+            <a:fillRef idx="1">
+              <a:schemeClr val="accent1"/>
+            </a:fillRef>
+            <a:effectRef idx="0">
+              <a:schemeClr val="accent1"/>
+            </a:effectRef>
+            <a:fontRef idx="minor">
+              <a:schemeClr val="lt1"/>
+            </a:fontRef>
+          </p:style>
+          <p:txBody>
+            <a:bodyPr rtlCol="0" anchor="ctr"/>
+            <a:lstStyle/>
+            <a:p>
+              <a:pPr algn="ctr"/>
+              <a:r>
+                <a:rPr lang="zh-CN" altLang="en-US" dirty="0"/>
+                <a:t>粗糙重建器</a:t>
+              </a:r>
+              <a:endParaRPr lang="en-US" dirty="0"/>
+            </a:p>
+          </p:txBody>
+        </p:sp>
+        <p:pic>
+          <p:nvPicPr>
+            <p:cNvPr id="12" name="Picture 11" descr="A multicolored image of a city&#10;&#10;Description automatically generated with medium confidence">
+              <a:extLst>
+                <a:ext uri="{FF2B5EF4-FFF2-40B4-BE49-F238E27FC236}">
+                  <a16:creationId xmlns:a16="http://schemas.microsoft.com/office/drawing/2014/main" id="{D13E0D23-EC4D-58A4-0F05-749F999EC317}"/>
+                </a:ext>
+              </a:extLst>
+            </p:cNvPr>
+            <p:cNvPicPr>
+              <a:picLocks noChangeAspect="1"/>
+            </p:cNvPicPr>
+            <p:nvPr/>
+          </p:nvPicPr>
+          <p:blipFill>
+            <a:blip r:embed="rId4">
+              <a:extLst>
+                <a:ext uri="{28A0092B-C50C-407E-A947-70E740481C1C}">
+                  <a14:useLocalDpi xmlns:a14="http://schemas.microsoft.com/office/drawing/2010/main" val="0"/>
+                </a:ext>
+              </a:extLst>
+            </a:blip>
+            <a:stretch>
+              <a:fillRect/>
+            </a:stretch>
+          </p:blipFill>
+          <p:spPr>
+            <a:xfrm>
+              <a:off x="15182879" y="13871107"/>
+              <a:ext cx="1828800" cy="1828800"/>
+            </a:xfrm>
+            <a:prstGeom prst="rect">
+              <a:avLst/>
+            </a:prstGeom>
+          </p:spPr>
+        </p:pic>
+        <mc:AlternateContent xmlns:mc="http://schemas.openxmlformats.org/markup-compatibility/2006">
+          <mc:Choice xmlns:a14="http://schemas.microsoft.com/office/drawing/2010/main" Requires="a14">
+            <p:sp>
+              <p:nvSpPr>
+                <p:cNvPr id="18" name="TextBox 17">
+                  <a:extLst>
+                    <a:ext uri="{FF2B5EF4-FFF2-40B4-BE49-F238E27FC236}">
+                      <a16:creationId xmlns:a16="http://schemas.microsoft.com/office/drawing/2014/main" id="{3ABD6A09-21F8-B9EF-D7C1-6B97DECBAD44}"/>
+                    </a:ext>
+                  </a:extLst>
+                </p:cNvPr>
+                <p:cNvSpPr txBox="1"/>
+                <p:nvPr/>
+              </p:nvSpPr>
+              <p:spPr>
+                <a:xfrm>
+                  <a:off x="23364711" y="14832720"/>
+                  <a:ext cx="470706" cy="677108"/>
+                </a:xfrm>
+                <a:prstGeom prst="rect">
+                  <a:avLst/>
+                </a:prstGeom>
+                <a:noFill/>
+              </p:spPr>
+              <p:txBody>
+                <a:bodyPr wrap="none" lIns="0" tIns="0" rIns="0" bIns="0" rtlCol="0">
+                  <a:spAutoFit/>
+                </a:bodyPr>
+                <a:lstStyle/>
+                <a:p>
+                  <a:pPr/>
+                  <a14:m>
+                    <m:oMathPara xmlns:m="http://schemas.openxmlformats.org/officeDocument/2006/math">
+                      <m:oMathParaPr>
+                        <m:jc m:val="centerGroup"/>
+                      </m:oMathParaPr>
+                      <m:oMath xmlns:m="http://schemas.openxmlformats.org/officeDocument/2006/math">
+                        <m:r>
+                          <a:rPr lang="en-US" sz="4400" i="1" smtClean="0">
+                            <a:solidFill>
+                              <a:schemeClr val="tx1"/>
+                            </a:solidFill>
+                            <a:latin typeface="Cambria Math" panose="02040503050406030204" pitchFamily="18" charset="0"/>
+                            <a:ea typeface="Cambria Math" panose="02040503050406030204" pitchFamily="18" charset="0"/>
+                          </a:rPr>
+                          <m:t>𝛼</m:t>
+                        </m:r>
+                      </m:oMath>
+                    </m:oMathPara>
+                  </a14:m>
+                  <a:endParaRPr lang="en-US" sz="4400" dirty="0">
+                    <a:solidFill>
+                      <a:schemeClr val="tx1"/>
+                    </a:solidFill>
+                  </a:endParaRPr>
+                </a:p>
+              </p:txBody>
+            </p:sp>
+          </mc:Choice>
+          <mc:Fallback>
+            <p:sp>
+              <p:nvSpPr>
+                <p:cNvPr id="18" name="TextBox 17">
+                  <a:extLst>
+                    <a:ext uri="{FF2B5EF4-FFF2-40B4-BE49-F238E27FC236}">
+                      <a16:creationId xmlns:a16="http://schemas.microsoft.com/office/drawing/2014/main" id="{3ABD6A09-21F8-B9EF-D7C1-6B97DECBAD44}"/>
+                    </a:ext>
+                  </a:extLst>
+                </p:cNvPr>
+                <p:cNvSpPr txBox="1">
+                  <a:spLocks noRot="1" noChangeAspect="1" noMove="1" noResize="1" noEditPoints="1" noAdjustHandles="1" noChangeArrowheads="1" noChangeShapeType="1" noTextEdit="1"/>
+                </p:cNvSpPr>
+                <p:nvPr/>
+              </p:nvSpPr>
+              <p:spPr>
+                <a:xfrm>
+                  <a:off x="23364711" y="14832720"/>
+                  <a:ext cx="470706" cy="677108"/>
+                </a:xfrm>
+                <a:prstGeom prst="rect">
+                  <a:avLst/>
+                </a:prstGeom>
+                <a:blipFill>
+                  <a:blip r:embed="rId5"/>
+                  <a:stretch>
+                    <a:fillRect/>
+                  </a:stretch>
+                </a:blipFill>
+              </p:spPr>
+              <p:txBody>
+                <a:bodyPr/>
+                <a:lstStyle/>
+                <a:p>
+                  <a:r>
+                    <a:rPr lang="en-US">
+                      <a:noFill/>
+                    </a:rPr>
+                    <a:t> </a:t>
+                  </a:r>
+                </a:p>
+              </p:txBody>
+            </p:sp>
+          </mc:Fallback>
+        </mc:AlternateContent>
+        <mc:AlternateContent xmlns:mc="http://schemas.openxmlformats.org/markup-compatibility/2006">
+          <mc:Choice xmlns:a14="http://schemas.microsoft.com/office/drawing/2010/main" Requires="a14">
+            <p:sp>
+              <p:nvSpPr>
+                <p:cNvPr id="21" name="TextBox 20">
+                  <a:extLst>
+                    <a:ext uri="{FF2B5EF4-FFF2-40B4-BE49-F238E27FC236}">
+                      <a16:creationId xmlns:a16="http://schemas.microsoft.com/office/drawing/2014/main" id="{D8AC7EF7-7BA8-158C-ED64-F2A1497C532F}"/>
+                    </a:ext>
+                  </a:extLst>
+                </p:cNvPr>
+                <p:cNvSpPr txBox="1"/>
+                <p:nvPr/>
+              </p:nvSpPr>
+              <p:spPr>
+                <a:xfrm>
+                  <a:off x="23107558" y="10743931"/>
+                  <a:ext cx="1455719" cy="677108"/>
+                </a:xfrm>
+                <a:prstGeom prst="rect">
+                  <a:avLst/>
+                </a:prstGeom>
+                <a:noFill/>
+              </p:spPr>
+              <p:txBody>
+                <a:bodyPr wrap="none" lIns="0" tIns="0" rIns="0" bIns="0" rtlCol="0">
+                  <a:spAutoFit/>
+                </a:bodyPr>
+                <a:lstStyle/>
+                <a:p>
+                  <a:pPr/>
+                  <a14:m>
+                    <m:oMathPara xmlns:m="http://schemas.openxmlformats.org/officeDocument/2006/math">
+                      <m:oMathParaPr>
+                        <m:jc m:val="centerGroup"/>
+                      </m:oMathParaPr>
+                      <m:oMath xmlns:m="http://schemas.openxmlformats.org/officeDocument/2006/math">
+                        <m:r>
+                          <a:rPr lang="en-US" sz="4400" b="0" i="1" smtClean="0">
+                            <a:solidFill>
+                              <a:schemeClr val="tx1"/>
+                            </a:solidFill>
+                            <a:latin typeface="Cambria Math" panose="02040503050406030204" pitchFamily="18" charset="0"/>
+                            <a:ea typeface="Cambria Math" panose="02040503050406030204" pitchFamily="18" charset="0"/>
+                          </a:rPr>
+                          <m:t>1−</m:t>
+                        </m:r>
+                        <m:r>
+                          <a:rPr lang="en-US" sz="4400" i="1" smtClean="0">
+                            <a:solidFill>
+                              <a:schemeClr val="tx1"/>
+                            </a:solidFill>
+                            <a:latin typeface="Cambria Math" panose="02040503050406030204" pitchFamily="18" charset="0"/>
+                            <a:ea typeface="Cambria Math" panose="02040503050406030204" pitchFamily="18" charset="0"/>
+                          </a:rPr>
+                          <m:t>𝛼</m:t>
+                        </m:r>
+                      </m:oMath>
+                    </m:oMathPara>
+                  </a14:m>
+                  <a:endParaRPr lang="en-US" sz="4400" dirty="0">
+                    <a:solidFill>
+                      <a:schemeClr val="tx1"/>
+                    </a:solidFill>
+                  </a:endParaRPr>
+                </a:p>
+              </p:txBody>
+            </p:sp>
+          </mc:Choice>
+          <mc:Fallback>
+            <p:sp>
+              <p:nvSpPr>
+                <p:cNvPr id="21" name="TextBox 20">
+                  <a:extLst>
+                    <a:ext uri="{FF2B5EF4-FFF2-40B4-BE49-F238E27FC236}">
+                      <a16:creationId xmlns:a16="http://schemas.microsoft.com/office/drawing/2014/main" id="{D8AC7EF7-7BA8-158C-ED64-F2A1497C532F}"/>
+                    </a:ext>
+                  </a:extLst>
+                </p:cNvPr>
+                <p:cNvSpPr txBox="1">
+                  <a:spLocks noRot="1" noChangeAspect="1" noMove="1" noResize="1" noEditPoints="1" noAdjustHandles="1" noChangeArrowheads="1" noChangeShapeType="1" noTextEdit="1"/>
+                </p:cNvSpPr>
+                <p:nvPr/>
+              </p:nvSpPr>
+              <p:spPr>
+                <a:xfrm>
+                  <a:off x="23107558" y="10743931"/>
+                  <a:ext cx="1455719" cy="677108"/>
+                </a:xfrm>
+                <a:prstGeom prst="rect">
+                  <a:avLst/>
+                </a:prstGeom>
+                <a:blipFill>
+                  <a:blip r:embed="rId6"/>
+                  <a:stretch>
+                    <a:fillRect/>
+                  </a:stretch>
+                </a:blipFill>
+              </p:spPr>
+              <p:txBody>
+                <a:bodyPr/>
+                <a:lstStyle/>
+                <a:p>
+                  <a:r>
+                    <a:rPr lang="en-US">
+                      <a:noFill/>
+                    </a:rPr>
+                    <a:t> </a:t>
+                  </a:r>
+                </a:p>
+              </p:txBody>
+            </p:sp>
+          </mc:Fallback>
+        </mc:AlternateContent>
+        <p:pic>
+          <p:nvPicPr>
+            <p:cNvPr id="23" name="Picture 22" descr="A purple and white background&#10;&#10;Description automatically generated">
+              <a:extLst>
+                <a:ext uri="{FF2B5EF4-FFF2-40B4-BE49-F238E27FC236}">
+                  <a16:creationId xmlns:a16="http://schemas.microsoft.com/office/drawing/2014/main" id="{0FD118F7-600D-B0B3-C2C4-FB2D11E27441}"/>
+                </a:ext>
+              </a:extLst>
+            </p:cNvPr>
+            <p:cNvPicPr>
+              <a:picLocks noChangeAspect="1"/>
+            </p:cNvPicPr>
+            <p:nvPr/>
+          </p:nvPicPr>
+          <p:blipFill>
+            <a:blip r:embed="rId7">
+              <a:extLst>
+                <a:ext uri="{28A0092B-C50C-407E-A947-70E740481C1C}">
+                  <a14:useLocalDpi xmlns:a14="http://schemas.microsoft.com/office/drawing/2010/main" val="0"/>
+                </a:ext>
+              </a:extLst>
+            </a:blip>
+            <a:stretch>
+              <a:fillRect/>
+            </a:stretch>
+          </p:blipFill>
+          <p:spPr>
+            <a:xfrm>
+              <a:off x="20773430" y="13871107"/>
+              <a:ext cx="1828800" cy="1828800"/>
+            </a:xfrm>
+            <a:prstGeom prst="rect">
+              <a:avLst/>
+            </a:prstGeom>
+          </p:spPr>
+        </p:pic>
+        <p:sp>
+          <p:nvSpPr>
+            <p:cNvPr id="25" name="Flowchart: Or 24">
+              <a:extLst>
+                <a:ext uri="{FF2B5EF4-FFF2-40B4-BE49-F238E27FC236}">
+                  <a16:creationId xmlns:a16="http://schemas.microsoft.com/office/drawing/2014/main" id="{041D04BE-7CB9-1D2C-1BB7-F2489AC60CD5}"/>
+                </a:ext>
+              </a:extLst>
+            </p:cNvPr>
+            <p:cNvSpPr/>
+            <p:nvPr/>
+          </p:nvSpPr>
+          <p:spPr>
+            <a:xfrm>
+              <a:off x="24712116" y="12869683"/>
+              <a:ext cx="393539" cy="381966"/>
+            </a:xfrm>
+            <a:prstGeom prst="flowChartOr">
+              <a:avLst/>
+            </a:prstGeom>
+            <a:solidFill>
+              <a:srgbClr val="0E7490"/>
+            </a:solidFill>
+          </p:spPr>
+          <p:style>
+            <a:lnRef idx="2">
+              <a:schemeClr val="accent1">
+                <a:shade val="15000"/>
+              </a:schemeClr>
+            </a:lnRef>
+            <a:fillRef idx="1">
+              <a:schemeClr val="accent1"/>
+            </a:fillRef>
+            <a:effectRef idx="0">
+              <a:schemeClr val="accent1"/>
+            </a:effectRef>
+            <a:fontRef idx="minor">
+              <a:schemeClr val="lt1"/>
+            </a:fontRef>
+          </p:style>
+          <p:txBody>
+            <a:bodyPr rtlCol="0" anchor="ctr"/>
+            <a:lstStyle/>
+            <a:p>
+              <a:pPr algn="ctr"/>
+              <a:endParaRPr lang="en-US"/>
+            </a:p>
+          </p:txBody>
+        </p:sp>
+        <p:pic>
+          <p:nvPicPr>
+            <p:cNvPr id="27" name="Picture 26" descr="A rainbow colored background with white lines&#10;&#10;Description automatically generated with medium confidence">
+              <a:extLst>
+                <a:ext uri="{FF2B5EF4-FFF2-40B4-BE49-F238E27FC236}">
+                  <a16:creationId xmlns:a16="http://schemas.microsoft.com/office/drawing/2014/main" id="{004C58EE-303E-DBCD-F727-2C4F7AC0359A}"/>
+                </a:ext>
+              </a:extLst>
+            </p:cNvPr>
+            <p:cNvPicPr>
+              <a:picLocks noChangeAspect="1"/>
+            </p:cNvPicPr>
+            <p:nvPr/>
+          </p:nvPicPr>
+          <p:blipFill>
+            <a:blip r:embed="rId8">
+              <a:extLst>
+                <a:ext uri="{28A0092B-C50C-407E-A947-70E740481C1C}">
+                  <a14:useLocalDpi xmlns:a14="http://schemas.microsoft.com/office/drawing/2010/main" val="0"/>
+                </a:ext>
+              </a:extLst>
+            </a:blip>
+            <a:stretch>
+              <a:fillRect/>
+            </a:stretch>
+          </p:blipFill>
+          <p:spPr>
+            <a:xfrm>
+              <a:off x="20773430" y="10581021"/>
+              <a:ext cx="1828800" cy="1828800"/>
+            </a:xfrm>
+            <a:prstGeom prst="rect">
+              <a:avLst/>
+            </a:prstGeom>
+          </p:spPr>
+        </p:pic>
+        <p:sp>
+          <p:nvSpPr>
+            <p:cNvPr id="28" name="Rectangle: Rounded Corners 27">
+              <a:extLst>
+                <a:ext uri="{FF2B5EF4-FFF2-40B4-BE49-F238E27FC236}">
+                  <a16:creationId xmlns:a16="http://schemas.microsoft.com/office/drawing/2014/main" id="{FFFC9422-E3A8-1618-7FCA-15BE49516616}"/>
+                </a:ext>
+              </a:extLst>
+            </p:cNvPr>
+            <p:cNvSpPr/>
+            <p:nvPr/>
+          </p:nvSpPr>
+          <p:spPr>
+            <a:xfrm>
+              <a:off x="27990644" y="12529396"/>
+              <a:ext cx="2293620" cy="1062537"/>
+            </a:xfrm>
+            <a:prstGeom prst="roundRect">
+              <a:avLst/>
+            </a:prstGeom>
+            <a:solidFill>
+              <a:srgbClr val="176B87"/>
+            </a:solidFill>
+            <a:ln w="50800">
+              <a:solidFill>
+                <a:srgbClr val="0F4C5C"/>
+              </a:solidFill>
+            </a:ln>
+          </p:spPr>
+          <p:style>
+            <a:lnRef idx="2">
+              <a:schemeClr val="accent1">
+                <a:shade val="15000"/>
+              </a:schemeClr>
+            </a:lnRef>
+            <a:fillRef idx="1">
+              <a:schemeClr val="accent1"/>
+            </a:fillRef>
+            <a:effectRef idx="0">
+              <a:schemeClr val="accent1"/>
+            </a:effectRef>
+            <a:fontRef idx="minor">
+              <a:schemeClr val="lt1"/>
+            </a:fontRef>
+          </p:style>
+          <p:txBody>
+            <a:bodyPr rtlCol="0" anchor="ctr"/>
+            <a:lstStyle/>
+            <a:p>
+              <a:pPr algn="ctr"/>
+              <a:r>
+                <a:rPr lang="zh-CN" altLang="en-US" dirty="0"/>
+                <a:t>加权</a:t>
+              </a:r>
+              <a:r>
+                <a:rPr lang="en-US" altLang="zh-CN" dirty="0"/>
+                <a:t>K-means</a:t>
+              </a:r>
+              <a:endParaRPr lang="en-US" dirty="0"/>
+            </a:p>
+          </p:txBody>
+        </p:sp>
+        <p:pic>
+          <p:nvPicPr>
+            <p:cNvPr id="30" name="Picture 29" descr="A blue and purple background with white lines&#10;&#10;Description automatically generated">
+              <a:extLst>
+                <a:ext uri="{FF2B5EF4-FFF2-40B4-BE49-F238E27FC236}">
+                  <a16:creationId xmlns:a16="http://schemas.microsoft.com/office/drawing/2014/main" id="{BFB864C0-4055-E52C-1837-07BEFFEDECB0}"/>
+                </a:ext>
+              </a:extLst>
+            </p:cNvPr>
+            <p:cNvPicPr>
+              <a:picLocks noChangeAspect="1"/>
+            </p:cNvPicPr>
+            <p:nvPr/>
+          </p:nvPicPr>
+          <p:blipFill>
+            <a:blip r:embed="rId9">
+              <a:extLst>
+                <a:ext uri="{28A0092B-C50C-407E-A947-70E740481C1C}">
+                  <a14:useLocalDpi xmlns:a14="http://schemas.microsoft.com/office/drawing/2010/main" val="0"/>
+                </a:ext>
+              </a:extLst>
+            </a:blip>
+            <a:stretch>
+              <a:fillRect/>
+            </a:stretch>
+          </p:blipFill>
+          <p:spPr>
+            <a:xfrm>
+              <a:off x="25578094" y="12146265"/>
+              <a:ext cx="1828800" cy="1828800"/>
+            </a:xfrm>
+            <a:prstGeom prst="rect">
+              <a:avLst/>
+            </a:prstGeom>
+          </p:spPr>
+        </p:pic>
+        <p:pic>
+          <p:nvPicPr>
+            <p:cNvPr id="32" name="Picture 31" descr="White particles in the sky with Gallery Arcturus in the background&#10;&#10;Description automatically generated">
+              <a:extLst>
+                <a:ext uri="{FF2B5EF4-FFF2-40B4-BE49-F238E27FC236}">
+                  <a16:creationId xmlns:a16="http://schemas.microsoft.com/office/drawing/2014/main" id="{FB7DDB53-1F1E-D4BE-964D-2FE64FA5D7A7}"/>
+                </a:ext>
+              </a:extLst>
+            </p:cNvPr>
+            <p:cNvPicPr>
+              <a:picLocks noChangeAspect="1"/>
+            </p:cNvPicPr>
+            <p:nvPr/>
+          </p:nvPicPr>
+          <p:blipFill>
+            <a:blip r:embed="rId10">
+              <a:extLst>
+                <a:ext uri="{28A0092B-C50C-407E-A947-70E740481C1C}">
+                  <a14:useLocalDpi xmlns:a14="http://schemas.microsoft.com/office/drawing/2010/main" val="0"/>
+                </a:ext>
+              </a:extLst>
+            </a:blip>
+            <a:stretch>
+              <a:fillRect/>
+            </a:stretch>
+          </p:blipFill>
+          <p:spPr>
+            <a:xfrm>
+              <a:off x="30868014" y="12146265"/>
+              <a:ext cx="1828800" cy="1828800"/>
+            </a:xfrm>
+            <a:prstGeom prst="rect">
+              <a:avLst/>
+            </a:prstGeom>
+          </p:spPr>
+        </p:pic>
+        <p:cxnSp>
+          <p:nvCxnSpPr>
+            <p:cNvPr id="34" name="Straight Arrow Connector 33">
+              <a:extLst>
+                <a:ext uri="{FF2B5EF4-FFF2-40B4-BE49-F238E27FC236}">
+                  <a16:creationId xmlns:a16="http://schemas.microsoft.com/office/drawing/2014/main" id="{639023DE-C011-3F07-37BC-AE7E82E559D0}"/>
+                </a:ext>
+              </a:extLst>
+            </p:cNvPr>
+            <p:cNvCxnSpPr>
+              <a:stCxn id="8" idx="3"/>
+              <a:endCxn id="10" idx="1"/>
+            </p:cNvCxnSpPr>
+            <p:nvPr/>
+          </p:nvCxnSpPr>
+          <p:spPr>
+            <a:xfrm>
+              <a:off x="11421129" y="14785508"/>
+              <a:ext cx="734065" cy="0"/>
+            </a:xfrm>
+            <a:prstGeom prst="straightConnector1">
+              <a:avLst/>
+            </a:prstGeom>
+            <a:ln w="63500">
+              <a:solidFill>
+                <a:srgbClr val="176B87"/>
+              </a:solidFill>
+              <a:tailEnd type="triangle"/>
+            </a:ln>
+          </p:spPr>
+          <p:style>
+            <a:lnRef idx="2">
+              <a:schemeClr val="accent1"/>
+            </a:lnRef>
+            <a:fillRef idx="0">
+              <a:schemeClr val="accent1"/>
+            </a:fillRef>
+            <a:effectRef idx="1">
+              <a:schemeClr val="accent1"/>
+            </a:effectRef>
+            <a:fontRef idx="minor">
+              <a:schemeClr val="tx1"/>
+            </a:fontRef>
+          </p:style>
+        </p:cxnSp>
+        <p:cxnSp>
+          <p:nvCxnSpPr>
+            <p:cNvPr id="36" name="Straight Arrow Connector 35">
+              <a:extLst>
+                <a:ext uri="{FF2B5EF4-FFF2-40B4-BE49-F238E27FC236}">
+                  <a16:creationId xmlns:a16="http://schemas.microsoft.com/office/drawing/2014/main" id="{94648F01-D20A-4414-0A6B-6A8E51655F60}"/>
+                </a:ext>
+              </a:extLst>
+            </p:cNvPr>
+            <p:cNvCxnSpPr>
+              <a:stCxn id="10" idx="3"/>
+              <a:endCxn id="12" idx="1"/>
+            </p:cNvCxnSpPr>
+            <p:nvPr/>
+          </p:nvCxnSpPr>
+          <p:spPr>
+            <a:xfrm flipV="1">
+              <a:off x="14448814" y="14785507"/>
+              <a:ext cx="734065" cy="1"/>
+            </a:xfrm>
+            <a:prstGeom prst="straightConnector1">
+              <a:avLst/>
+            </a:prstGeom>
+            <a:ln w="63500">
+              <a:solidFill>
+                <a:srgbClr val="176B87"/>
+              </a:solidFill>
+              <a:tailEnd type="triangle"/>
+            </a:ln>
+          </p:spPr>
+          <p:style>
+            <a:lnRef idx="2">
+              <a:schemeClr val="accent1"/>
+            </a:lnRef>
+            <a:fillRef idx="0">
+              <a:schemeClr val="accent1"/>
+            </a:fillRef>
+            <a:effectRef idx="1">
+              <a:schemeClr val="accent1"/>
+            </a:effectRef>
+            <a:fontRef idx="minor">
+              <a:schemeClr val="tx1"/>
+            </a:fontRef>
+          </p:style>
+        </p:cxnSp>
+        <p:cxnSp>
+          <p:nvCxnSpPr>
+            <p:cNvPr id="46" name="Straight Arrow Connector 45">
+              <a:extLst>
+                <a:ext uri="{FF2B5EF4-FFF2-40B4-BE49-F238E27FC236}">
+                  <a16:creationId xmlns:a16="http://schemas.microsoft.com/office/drawing/2014/main" id="{03017675-F748-4F08-B0B7-615A4C4F4A7E}"/>
+                </a:ext>
+              </a:extLst>
+            </p:cNvPr>
+            <p:cNvCxnSpPr>
+              <a:cxnSpLocks/>
+              <a:stCxn id="12" idx="3"/>
+              <a:endCxn id="49" idx="1"/>
+            </p:cNvCxnSpPr>
+            <p:nvPr/>
+          </p:nvCxnSpPr>
+          <p:spPr>
+            <a:xfrm>
+              <a:off x="17011679" y="14785507"/>
+              <a:ext cx="734065" cy="0"/>
+            </a:xfrm>
+            <a:prstGeom prst="straightConnector1">
+              <a:avLst/>
+            </a:prstGeom>
+            <a:ln w="63500">
+              <a:solidFill>
+                <a:srgbClr val="176B87"/>
+              </a:solidFill>
+              <a:tailEnd type="triangle"/>
+            </a:ln>
+          </p:spPr>
+          <p:style>
+            <a:lnRef idx="2">
+              <a:schemeClr val="accent1"/>
+            </a:lnRef>
+            <a:fillRef idx="0">
+              <a:schemeClr val="accent1"/>
+            </a:fillRef>
+            <a:effectRef idx="1">
+              <a:schemeClr val="accent1"/>
+            </a:effectRef>
+            <a:fontRef idx="minor">
+              <a:schemeClr val="tx1"/>
+            </a:fontRef>
+          </p:style>
+        </p:cxnSp>
+        <p:cxnSp>
+          <p:nvCxnSpPr>
+            <p:cNvPr id="51" name="Connector: Elbow 50">
+              <a:extLst>
+                <a:ext uri="{FF2B5EF4-FFF2-40B4-BE49-F238E27FC236}">
+                  <a16:creationId xmlns:a16="http://schemas.microsoft.com/office/drawing/2014/main" id="{1212B249-8E5A-12B5-2499-1CCC80012C8F}"/>
+                </a:ext>
+              </a:extLst>
+            </p:cNvPr>
+            <p:cNvCxnSpPr>
+              <a:stCxn id="27" idx="3"/>
+              <a:endCxn id="25" idx="0"/>
+            </p:cNvCxnSpPr>
+            <p:nvPr/>
+          </p:nvCxnSpPr>
+          <p:spPr>
+            <a:xfrm>
+              <a:off x="22602230" y="11495421"/>
+              <a:ext cx="2306656" cy="1374262"/>
+            </a:xfrm>
+            <a:prstGeom prst="bentConnector2">
+              <a:avLst/>
+            </a:prstGeom>
+            <a:ln w="63500">
+              <a:solidFill>
+                <a:srgbClr val="176B87"/>
+              </a:solidFill>
+              <a:tailEnd type="triangle"/>
+            </a:ln>
+          </p:spPr>
+          <p:style>
+            <a:lnRef idx="2">
+              <a:schemeClr val="accent1"/>
+            </a:lnRef>
+            <a:fillRef idx="0">
+              <a:schemeClr val="accent1"/>
+            </a:fillRef>
+            <a:effectRef idx="1">
+              <a:schemeClr val="accent1"/>
+            </a:effectRef>
+            <a:fontRef idx="minor">
+              <a:schemeClr val="tx1"/>
+            </a:fontRef>
+          </p:style>
+        </p:cxnSp>
+        <p:cxnSp>
+          <p:nvCxnSpPr>
+            <p:cNvPr id="53" name="Connector: Elbow 52">
+              <a:extLst>
+                <a:ext uri="{FF2B5EF4-FFF2-40B4-BE49-F238E27FC236}">
+                  <a16:creationId xmlns:a16="http://schemas.microsoft.com/office/drawing/2014/main" id="{F7BF0AEF-41B9-90DD-12B1-19EBA4D0EF9F}"/>
+                </a:ext>
+              </a:extLst>
+            </p:cNvPr>
+            <p:cNvCxnSpPr>
+              <a:stCxn id="23" idx="3"/>
+              <a:endCxn id="25" idx="4"/>
+            </p:cNvCxnSpPr>
+            <p:nvPr/>
+          </p:nvCxnSpPr>
+          <p:spPr>
+            <a:xfrm flipV="1">
+              <a:off x="22602230" y="13251649"/>
+              <a:ext cx="2306656" cy="1533858"/>
+            </a:xfrm>
+            <a:prstGeom prst="bentConnector2">
+              <a:avLst/>
+            </a:prstGeom>
+            <a:ln w="63500">
+              <a:solidFill>
+                <a:srgbClr val="176B87"/>
+              </a:solidFill>
+              <a:tailEnd type="triangle"/>
+            </a:ln>
+          </p:spPr>
+          <p:style>
+            <a:lnRef idx="2">
+              <a:schemeClr val="accent1"/>
+            </a:lnRef>
+            <a:fillRef idx="0">
+              <a:schemeClr val="accent1"/>
+            </a:fillRef>
+            <a:effectRef idx="1">
+              <a:schemeClr val="accent1"/>
+            </a:effectRef>
+            <a:fontRef idx="minor">
+              <a:schemeClr val="tx1"/>
+            </a:fontRef>
+          </p:style>
+        </p:cxnSp>
+        <p:sp>
+          <p:nvSpPr>
+            <p:cNvPr id="58" name="TextBox 57">
+              <a:extLst>
+                <a:ext uri="{FF2B5EF4-FFF2-40B4-BE49-F238E27FC236}">
+                  <a16:creationId xmlns:a16="http://schemas.microsoft.com/office/drawing/2014/main" id="{CDBED512-9FAD-CF51-3DE5-E576094D4B35}"/>
+                </a:ext>
+              </a:extLst>
+            </p:cNvPr>
+            <p:cNvSpPr txBox="1"/>
+            <p:nvPr/>
+          </p:nvSpPr>
+          <p:spPr>
+            <a:xfrm>
+              <a:off x="15312449" y="15827220"/>
+              <a:ext cx="1569660" cy="369332"/>
+            </a:xfrm>
+            <a:prstGeom prst="rect">
+              <a:avLst/>
+            </a:prstGeom>
+            <a:noFill/>
+          </p:spPr>
+          <p:txBody>
+            <a:bodyPr wrap="none" rtlCol="0">
+              <a:spAutoFit/>
+            </a:bodyPr>
+            <a:lstStyle/>
+            <a:p>
+              <a:r>
+                <a:rPr lang="zh-CN" altLang="en-US" dirty="0">
+                  <a:solidFill>
+                    <a:srgbClr val="2F3437"/>
+                  </a:solidFill>
+                </a:rPr>
+                <a:t>粗糙信道地图</a:t>
+              </a:r>
+              <a:endParaRPr lang="en-US" dirty="0">
+                <a:solidFill>
+                  <a:srgbClr val="2F3437"/>
+                </a:solidFill>
+              </a:endParaRPr>
+            </a:p>
+          </p:txBody>
+        </p:sp>
+        <p:sp>
+          <p:nvSpPr>
+            <p:cNvPr id="59" name="TextBox 58">
+              <a:extLst>
+                <a:ext uri="{FF2B5EF4-FFF2-40B4-BE49-F238E27FC236}">
+                  <a16:creationId xmlns:a16="http://schemas.microsoft.com/office/drawing/2014/main" id="{BFF4EE3E-A0C0-A983-DC04-583DEAA7752F}"/>
+                </a:ext>
+              </a:extLst>
+            </p:cNvPr>
+            <p:cNvSpPr txBox="1"/>
+            <p:nvPr/>
+          </p:nvSpPr>
+          <p:spPr>
+            <a:xfrm>
+              <a:off x="20902999" y="15827220"/>
+              <a:ext cx="1562031" cy="369332"/>
+            </a:xfrm>
+            <a:prstGeom prst="rect">
+              <a:avLst/>
+            </a:prstGeom>
+            <a:noFill/>
+          </p:spPr>
+          <p:txBody>
+            <a:bodyPr wrap="none" rtlCol="0">
+              <a:spAutoFit/>
+            </a:bodyPr>
+            <a:lstStyle>
+              <a:defPPr>
+                <a:defRPr lang="en-US"/>
+              </a:defPPr>
+              <a:lvl1pPr>
+                <a:defRPr>
+                  <a:solidFill>
+                    <a:srgbClr val="2F3437"/>
+                  </a:solidFill>
+                </a:defRPr>
+              </a:lvl1pPr>
+            </a:lstStyle>
+            <a:p>
+              <a:r>
+                <a:rPr lang="zh-CN" altLang="en-US" dirty="0"/>
+                <a:t>归一化梯度图</a:t>
+              </a:r>
+              <a:endParaRPr lang="en-US" dirty="0"/>
+            </a:p>
+          </p:txBody>
+        </p:sp>
+        <p:sp>
+          <p:nvSpPr>
+            <p:cNvPr id="60" name="TextBox 59">
+              <a:extLst>
+                <a:ext uri="{FF2B5EF4-FFF2-40B4-BE49-F238E27FC236}">
+                  <a16:creationId xmlns:a16="http://schemas.microsoft.com/office/drawing/2014/main" id="{4DA3F92F-B27F-00C3-9EDA-1F2FE5DEAEB8}"/>
+                </a:ext>
+              </a:extLst>
+            </p:cNvPr>
+            <p:cNvSpPr txBox="1"/>
+            <p:nvPr/>
+          </p:nvSpPr>
+          <p:spPr>
+            <a:xfrm>
+              <a:off x="20552936" y="12484203"/>
+              <a:ext cx="2262158" cy="369332"/>
+            </a:xfrm>
+            <a:prstGeom prst="rect">
+              <a:avLst/>
+            </a:prstGeom>
+            <a:noFill/>
+          </p:spPr>
+          <p:txBody>
+            <a:bodyPr wrap="none" rtlCol="0">
+              <a:spAutoFit/>
+            </a:bodyPr>
+            <a:lstStyle>
+              <a:defPPr>
+                <a:defRPr lang="en-US"/>
+              </a:defPPr>
+              <a:lvl1pPr>
+                <a:defRPr>
+                  <a:solidFill>
+                    <a:srgbClr val="2F3437"/>
+                  </a:solidFill>
+                </a:defRPr>
+              </a:lvl1pPr>
+            </a:lstStyle>
+            <a:p>
+              <a:r>
+                <a:rPr lang="zh-CN" altLang="en-US" dirty="0"/>
+                <a:t>归一化发射机距离图</a:t>
+              </a:r>
+              <a:endParaRPr lang="en-US" dirty="0"/>
+            </a:p>
+          </p:txBody>
+        </p:sp>
+        <p:cxnSp>
+          <p:nvCxnSpPr>
+            <p:cNvPr id="63" name="Straight Arrow Connector 62">
+              <a:extLst>
+                <a:ext uri="{FF2B5EF4-FFF2-40B4-BE49-F238E27FC236}">
+                  <a16:creationId xmlns:a16="http://schemas.microsoft.com/office/drawing/2014/main" id="{39A390B4-8E8B-6207-3E2E-90D5AB08C660}"/>
+                </a:ext>
+              </a:extLst>
+            </p:cNvPr>
+            <p:cNvCxnSpPr>
+              <a:stCxn id="25" idx="6"/>
+              <a:endCxn id="30" idx="1"/>
+            </p:cNvCxnSpPr>
+            <p:nvPr/>
+          </p:nvCxnSpPr>
+          <p:spPr>
+            <a:xfrm flipV="1">
+              <a:off x="25105655" y="13060665"/>
+              <a:ext cx="472439" cy="1"/>
+            </a:xfrm>
+            <a:prstGeom prst="straightConnector1">
+              <a:avLst/>
+            </a:prstGeom>
+            <a:ln w="63500">
+              <a:solidFill>
+                <a:srgbClr val="176B87"/>
+              </a:solidFill>
+              <a:tailEnd type="triangle"/>
+            </a:ln>
+          </p:spPr>
+          <p:style>
+            <a:lnRef idx="2">
+              <a:schemeClr val="accent1"/>
+            </a:lnRef>
+            <a:fillRef idx="0">
+              <a:schemeClr val="accent1"/>
+            </a:fillRef>
+            <a:effectRef idx="1">
+              <a:schemeClr val="accent1"/>
+            </a:effectRef>
+            <a:fontRef idx="minor">
+              <a:schemeClr val="tx1"/>
+            </a:fontRef>
+          </p:style>
+        </p:cxnSp>
+        <p:sp>
+          <p:nvSpPr>
+            <p:cNvPr id="65" name="TextBox 64">
+              <a:extLst>
+                <a:ext uri="{FF2B5EF4-FFF2-40B4-BE49-F238E27FC236}">
+                  <a16:creationId xmlns:a16="http://schemas.microsoft.com/office/drawing/2014/main" id="{0D954800-E8DF-E06E-BC3F-800FFBE3B3DB}"/>
+                </a:ext>
+              </a:extLst>
+            </p:cNvPr>
+            <p:cNvSpPr txBox="1"/>
+            <p:nvPr/>
+          </p:nvSpPr>
+          <p:spPr>
+            <a:xfrm>
+              <a:off x="25823080" y="14069573"/>
+              <a:ext cx="1338828" cy="369332"/>
+            </a:xfrm>
+            <a:prstGeom prst="rect">
+              <a:avLst/>
+            </a:prstGeom>
+            <a:noFill/>
+          </p:spPr>
+          <p:txBody>
+            <a:bodyPr wrap="none" rtlCol="0">
+              <a:spAutoFit/>
+            </a:bodyPr>
+            <a:lstStyle>
+              <a:defPPr>
+                <a:defRPr lang="en-US"/>
+              </a:defPPr>
+              <a:lvl1pPr>
+                <a:defRPr>
+                  <a:solidFill>
+                    <a:srgbClr val="2F3437"/>
+                  </a:solidFill>
+                </a:defRPr>
+              </a:lvl1pPr>
+            </a:lstStyle>
+            <a:p>
+              <a:r>
+                <a:rPr lang="zh-CN" altLang="en-US" dirty="0"/>
+                <a:t>采样分数图</a:t>
+              </a:r>
+              <a:endParaRPr lang="en-US" dirty="0"/>
+            </a:p>
+          </p:txBody>
+        </p:sp>
+        <p:cxnSp>
+          <p:nvCxnSpPr>
+            <p:cNvPr id="67" name="Straight Arrow Connector 66">
+              <a:extLst>
+                <a:ext uri="{FF2B5EF4-FFF2-40B4-BE49-F238E27FC236}">
+                  <a16:creationId xmlns:a16="http://schemas.microsoft.com/office/drawing/2014/main" id="{6E0FB293-8271-AA8D-AD67-687DA10BA385}"/>
+                </a:ext>
+              </a:extLst>
+            </p:cNvPr>
+            <p:cNvCxnSpPr>
+              <a:stCxn id="30" idx="3"/>
+              <a:endCxn id="28" idx="1"/>
+            </p:cNvCxnSpPr>
+            <p:nvPr/>
+          </p:nvCxnSpPr>
+          <p:spPr>
+            <a:xfrm>
+              <a:off x="27406894" y="13060665"/>
+              <a:ext cx="583750" cy="0"/>
+            </a:xfrm>
+            <a:prstGeom prst="straightConnector1">
+              <a:avLst/>
+            </a:prstGeom>
+            <a:ln w="63500">
+              <a:solidFill>
+                <a:srgbClr val="176B87"/>
+              </a:solidFill>
+              <a:tailEnd type="triangle"/>
+            </a:ln>
+          </p:spPr>
+          <p:style>
+            <a:lnRef idx="2">
+              <a:schemeClr val="accent1"/>
+            </a:lnRef>
+            <a:fillRef idx="0">
+              <a:schemeClr val="accent1"/>
+            </a:fillRef>
+            <a:effectRef idx="1">
+              <a:schemeClr val="accent1"/>
+            </a:effectRef>
+            <a:fontRef idx="minor">
+              <a:schemeClr val="tx1"/>
+            </a:fontRef>
+          </p:style>
+        </p:cxnSp>
+        <p:cxnSp>
+          <p:nvCxnSpPr>
+            <p:cNvPr id="69" name="Straight Arrow Connector 68">
+              <a:extLst>
+                <a:ext uri="{FF2B5EF4-FFF2-40B4-BE49-F238E27FC236}">
+                  <a16:creationId xmlns:a16="http://schemas.microsoft.com/office/drawing/2014/main" id="{E6C81FFB-950F-6282-9C20-B1702D94CDF3}"/>
+                </a:ext>
+              </a:extLst>
+            </p:cNvPr>
+            <p:cNvCxnSpPr>
+              <a:stCxn id="28" idx="3"/>
+              <a:endCxn id="32" idx="1"/>
+            </p:cNvCxnSpPr>
+            <p:nvPr/>
+          </p:nvCxnSpPr>
+          <p:spPr>
+            <a:xfrm>
+              <a:off x="30284264" y="13060665"/>
+              <a:ext cx="583750" cy="0"/>
+            </a:xfrm>
+            <a:prstGeom prst="straightConnector1">
+              <a:avLst/>
+            </a:prstGeom>
+            <a:ln w="63500">
+              <a:solidFill>
+                <a:srgbClr val="176B87"/>
+              </a:solidFill>
+              <a:tailEnd type="triangle"/>
+            </a:ln>
+          </p:spPr>
+          <p:style>
+            <a:lnRef idx="2">
+              <a:schemeClr val="accent1"/>
+            </a:lnRef>
+            <a:fillRef idx="0">
+              <a:schemeClr val="accent1"/>
+            </a:fillRef>
+            <a:effectRef idx="1">
+              <a:schemeClr val="accent1"/>
+            </a:effectRef>
+            <a:fontRef idx="minor">
+              <a:schemeClr val="tx1"/>
+            </a:fontRef>
+          </p:style>
+        </p:cxnSp>
+        <p:sp>
+          <p:nvSpPr>
+            <p:cNvPr id="70" name="TextBox 69">
+              <a:extLst>
+                <a:ext uri="{FF2B5EF4-FFF2-40B4-BE49-F238E27FC236}">
+                  <a16:creationId xmlns:a16="http://schemas.microsoft.com/office/drawing/2014/main" id="{645DEAF9-C8DC-8178-2646-99DBA873226B}"/>
+                </a:ext>
+              </a:extLst>
+            </p:cNvPr>
+            <p:cNvSpPr txBox="1"/>
+            <p:nvPr/>
+          </p:nvSpPr>
+          <p:spPr>
+            <a:xfrm>
+              <a:off x="30997584" y="14069573"/>
+              <a:ext cx="1569660" cy="369332"/>
+            </a:xfrm>
+            <a:prstGeom prst="rect">
+              <a:avLst/>
+            </a:prstGeom>
+            <a:noFill/>
+          </p:spPr>
+          <p:txBody>
+            <a:bodyPr wrap="none" rtlCol="0">
+              <a:spAutoFit/>
+            </a:bodyPr>
+            <a:lstStyle>
+              <a:defPPr>
+                <a:defRPr lang="en-US"/>
+              </a:defPPr>
+              <a:lvl1pPr>
+                <a:defRPr>
+                  <a:solidFill>
+                    <a:srgbClr val="2F3437"/>
+                  </a:solidFill>
+                </a:defRPr>
+              </a:lvl1pPr>
+            </a:lstStyle>
+            <a:p>
+              <a:r>
+                <a:rPr lang="zh-CN" altLang="en-US" dirty="0"/>
+                <a:t>采样点掩码图</a:t>
+              </a:r>
+              <a:endParaRPr lang="en-US" dirty="0"/>
+            </a:p>
+          </p:txBody>
+        </p:sp>
+        <p:sp>
+          <p:nvSpPr>
+            <p:cNvPr id="49" name="Rectangle: Rounded Corners 48">
+              <a:extLst>
+                <a:ext uri="{FF2B5EF4-FFF2-40B4-BE49-F238E27FC236}">
+                  <a16:creationId xmlns:a16="http://schemas.microsoft.com/office/drawing/2014/main" id="{167D6E5C-14B3-49F1-CA6B-F1FE0FA920DF}"/>
+                </a:ext>
+              </a:extLst>
+            </p:cNvPr>
+            <p:cNvSpPr/>
+            <p:nvPr/>
+          </p:nvSpPr>
+          <p:spPr>
+            <a:xfrm>
+              <a:off x="17745744" y="14254238"/>
+              <a:ext cx="2293620" cy="1062537"/>
+            </a:xfrm>
+            <a:prstGeom prst="roundRect">
+              <a:avLst/>
+            </a:prstGeom>
+            <a:solidFill>
+              <a:srgbClr val="176B87"/>
+            </a:solidFill>
+            <a:ln w="50800">
+              <a:solidFill>
+                <a:srgbClr val="0F4C5C"/>
+              </a:solidFill>
+            </a:ln>
+          </p:spPr>
+          <p:style>
+            <a:lnRef idx="2">
+              <a:schemeClr val="accent1">
+                <a:shade val="15000"/>
+              </a:schemeClr>
+            </a:lnRef>
+            <a:fillRef idx="1">
+              <a:schemeClr val="accent1"/>
+            </a:fillRef>
+            <a:effectRef idx="0">
+              <a:schemeClr val="accent1"/>
+            </a:effectRef>
+            <a:fontRef idx="minor">
+              <a:schemeClr val="lt1"/>
+            </a:fontRef>
+          </p:style>
+          <p:txBody>
+            <a:bodyPr rtlCol="0" anchor="ctr"/>
+            <a:lstStyle/>
+            <a:p>
+              <a:pPr algn="ctr"/>
+              <a:r>
+                <a:rPr lang="en-US" altLang="zh-CN"/>
+                <a:t>Sobel</a:t>
+              </a:r>
+              <a:r>
+                <a:rPr lang="zh-CN" altLang="en-US" dirty="0"/>
+                <a:t>算子</a:t>
+              </a:r>
+              <a:endParaRPr lang="en-US" dirty="0"/>
+            </a:p>
+          </p:txBody>
+        </p:sp>
+        <p:cxnSp>
+          <p:nvCxnSpPr>
+            <p:cNvPr id="56" name="Straight Arrow Connector 55">
+              <a:extLst>
+                <a:ext uri="{FF2B5EF4-FFF2-40B4-BE49-F238E27FC236}">
+                  <a16:creationId xmlns:a16="http://schemas.microsoft.com/office/drawing/2014/main" id="{226D5110-BC25-008B-5E94-CD71B7A6D219}"/>
+                </a:ext>
+              </a:extLst>
+            </p:cNvPr>
+            <p:cNvCxnSpPr>
+              <a:stCxn id="49" idx="3"/>
+              <a:endCxn id="23" idx="1"/>
+            </p:cNvCxnSpPr>
+            <p:nvPr/>
+          </p:nvCxnSpPr>
+          <p:spPr>
+            <a:xfrm>
+              <a:off x="20039364" y="14785507"/>
+              <a:ext cx="734066" cy="0"/>
+            </a:xfrm>
+            <a:prstGeom prst="straightConnector1">
+              <a:avLst/>
+            </a:prstGeom>
+            <a:ln w="63500">
+              <a:solidFill>
+                <a:srgbClr val="176B87"/>
+              </a:solidFill>
+              <a:tailEnd type="triangle"/>
+            </a:ln>
+          </p:spPr>
+          <p:style>
+            <a:lnRef idx="2">
+              <a:schemeClr val="accent1"/>
+            </a:lnRef>
+            <a:fillRef idx="0">
+              <a:schemeClr val="accent1"/>
+            </a:fillRef>
+            <a:effectRef idx="1">
+              <a:schemeClr val="accent1"/>
+            </a:effectRef>
+            <a:fontRef idx="minor">
+              <a:schemeClr val="tx1"/>
+            </a:fontRef>
+          </p:style>
+        </p:cxnSp>
+      </p:grpSp>
+    </p:spTree>
+    <p:extLst>
+      <p:ext uri="{BB962C8B-B14F-4D97-AF65-F5344CB8AC3E}">
+        <p14:creationId xmlns:p14="http://schemas.microsoft.com/office/powerpoint/2010/main" val="3199259902"/>
       </p:ext>
     </p:extLst>
   </p:cSld>
